--- a/Survey of RVOS Presentation.pptx
+++ b/Survey of RVOS Presentation.pptx
@@ -4381,94 +4381,6 @@
           <a:p>
             <a:pPr algn="ctr"/>
             <a:endParaRPr/>
-          </a:p>
-        </p:txBody>
-      </p:sp>
-      <p:sp>
-        <p:nvSpPr>
-          <p:cNvPr id="3" name="Rounded Rectangle 2"/>
-          <p:cNvSpPr/>
-          <p:nvPr/>
-        </p:nvSpPr>
-        <p:spPr>
-          <a:xfrm>
-            <a:off x="777240" y="658368"/>
-            <a:ext cx="1444752" cy="274320"/>
-          </a:xfrm>
-          <a:prstGeom prst="roundRect">
-            <a:avLst>
-              <a:gd name="adj" fmla="val 12000"/>
-            </a:avLst>
-          </a:prstGeom>
-          <a:solidFill>
-            <a:srgbClr val="17394A"/>
-          </a:solidFill>
-          <a:ln>
-            <a:noFill/>
-          </a:ln>
-        </p:spPr>
-        <p:style>
-          <a:lnRef idx="1">
-            <a:schemeClr val="accent1"/>
-          </a:lnRef>
-          <a:fillRef idx="3">
-            <a:schemeClr val="accent1"/>
-          </a:fillRef>
-          <a:effectRef idx="2">
-            <a:schemeClr val="accent1"/>
-          </a:effectRef>
-          <a:fontRef idx="minor">
-            <a:schemeClr val="lt1"/>
-          </a:fontRef>
-        </p:style>
-        <p:txBody>
-          <a:bodyPr rtlCol="0" anchor="ctr"/>
-          <a:lstStyle/>
-          <a:p>
-            <a:pPr algn="ctr"/>
-            <a:endParaRPr/>
-          </a:p>
-        </p:txBody>
-      </p:sp>
-      <p:sp>
-        <p:nvSpPr>
-          <p:cNvPr id="4" name="TextBox 3"/>
-          <p:cNvSpPr txBox="1"/>
-          <p:nvPr/>
-        </p:nvSpPr>
-        <p:spPr>
-          <a:xfrm>
-            <a:off x="850392" y="681228"/>
-            <a:ext cx="1298448" cy="210312"/>
-          </a:xfrm>
-          <a:prstGeom prst="rect">
-            <a:avLst/>
-          </a:prstGeom>
-          <a:noFill/>
-        </p:spPr>
-        <p:txBody>
-          <a:bodyPr wrap="square" lIns="0" tIns="0" rIns="0" bIns="0" anchor="ctr">
-            <a:spAutoFit/>
-          </a:bodyPr>
-          <a:lstStyle/>
-          <a:p>
-            <a:pPr algn="ctr">
-              <a:spcBef>
-                <a:spcPts val="0"/>
-              </a:spcBef>
-              <a:spcAft>
-                <a:spcPts val="0"/>
-              </a:spcAft>
-              <a:defRPr sz="900" b="1" i="0">
-                <a:solidFill>
-                  <a:srgbClr val="65D5CC"/>
-                </a:solidFill>
-                <a:latin typeface="Aptos"/>
-              </a:defRPr>
-            </a:pPr>
-            <a:r>
-              <a:t>20-MINUTE TALK</a:t>
-            </a:r>
           </a:p>
         </p:txBody>
       </p:sp>
